--- a/public/decks/karpathy-sequoia-ascent-2026.pptx
+++ b/public/decks/karpathy-sequoia-ascent-2026.pptx
@@ -11250,7 +11250,7 @@
               </a:lnSpc>
             </a:pPr>
             <a:r>
-              <a:rPr sz="4400" b="1" i="0">
+              <a:rPr sz="3000" b="1" i="0">
                 <a:solidFill>
                   <a:srgbClr val="141413"/>
                 </a:solidFill>

--- a/public/decks/karpathy-sequoia-ascent-2026.pptx
+++ b/public/decks/karpathy-sequoia-ascent-2026.pptx
@@ -6586,7 +6586,7 @@
               </a:lnSpc>
             </a:pPr>
             <a:r>
-              <a:rPr sz="1300" b="1" i="0">
+              <a:rPr sz="1200" b="1" i="0">
                 <a:solidFill>
                   <a:srgbClr val="141413"/>
                 </a:solidFill>
@@ -6828,7 +6828,7 @@
               </a:lnSpc>
             </a:pPr>
             <a:r>
-              <a:rPr sz="1300" b="1" i="0">
+              <a:rPr sz="1200" b="1" i="0">
                 <a:solidFill>
                   <a:srgbClr val="141413"/>
                 </a:solidFill>
@@ -7070,7 +7070,7 @@
               </a:lnSpc>
             </a:pPr>
             <a:r>
-              <a:rPr sz="1300" b="1" i="0">
+              <a:rPr sz="1200" b="1" i="0">
                 <a:solidFill>
                   <a:srgbClr val="141413"/>
                 </a:solidFill>
@@ -7312,7 +7312,7 @@
               </a:lnSpc>
             </a:pPr>
             <a:r>
-              <a:rPr sz="1300" b="1" i="0">
+              <a:rPr sz="1200" b="1" i="0">
                 <a:solidFill>
                   <a:srgbClr val="141413"/>
                 </a:solidFill>
@@ -7554,7 +7554,7 @@
               </a:lnSpc>
             </a:pPr>
             <a:r>
-              <a:rPr sz="1300" b="1" i="0">
+              <a:rPr sz="1200" b="1" i="0">
                 <a:solidFill>
                   <a:srgbClr val="141413"/>
                 </a:solidFill>
@@ -11088,7 +11088,7 @@
               </a:lnSpc>
             </a:pPr>
             <a:r>
-              <a:rPr sz="4800" b="1" i="0">
+              <a:rPr sz="3000" b="1" i="0">
                 <a:solidFill>
                   <a:srgbClr val="141413"/>
                 </a:solidFill>
@@ -11412,7 +11412,7 @@
               </a:lnSpc>
             </a:pPr>
             <a:r>
-              <a:rPr sz="4800" b="1" i="0">
+              <a:rPr sz="3000" b="1" i="0">
                 <a:solidFill>
                   <a:srgbClr val="141413"/>
                 </a:solidFill>
@@ -11574,7 +11574,7 @@
               </a:lnSpc>
             </a:pPr>
             <a:r>
-              <a:rPr sz="4800" b="1" i="0">
+              <a:rPr sz="3000" b="1" i="0">
                 <a:solidFill>
                   <a:srgbClr val="141413"/>
                 </a:solidFill>
@@ -14188,7 +14188,7 @@
               </a:lnSpc>
             </a:pPr>
             <a:r>
-              <a:rPr sz="2200" b="1" i="0">
+              <a:rPr sz="2000" b="1" i="0">
                 <a:solidFill>
                   <a:srgbClr val="141413"/>
                 </a:solidFill>
@@ -14481,7 +14481,7 @@
               </a:lnSpc>
             </a:pPr>
             <a:r>
-              <a:rPr sz="2200" b="1" i="0">
+              <a:rPr sz="2000" b="1" i="0">
                 <a:solidFill>
                   <a:srgbClr val="141413"/>
                 </a:solidFill>
@@ -15245,7 +15245,7 @@
               </a:lnSpc>
             </a:pPr>
             <a:r>
-              <a:rPr sz="2200" b="1" i="0">
+              <a:rPr sz="2000" b="1" i="0">
                 <a:solidFill>
                   <a:srgbClr val="141413"/>
                 </a:solidFill>
@@ -15538,7 +15538,7 @@
               </a:lnSpc>
             </a:pPr>
             <a:r>
-              <a:rPr sz="2200" b="1" i="0">
+              <a:rPr sz="2000" b="1" i="0">
                 <a:solidFill>
                   <a:srgbClr val="141413"/>
                 </a:solidFill>

--- a/public/decks/karpathy-sequoia-ascent-2026.pptx
+++ b/public/decks/karpathy-sequoia-ascent-2026.pptx
@@ -6486,8 +6486,8 @@
         </p:nvSpPr>
         <p:spPr>
           <a:xfrm>
-            <a:off x="640080" y="3520440"/>
-            <a:ext cx="777240" cy="548640"/>
+            <a:off x="640080" y="3337560"/>
+            <a:ext cx="777240" cy="612648"/>
           </a:xfrm>
           <a:prstGeom prst="rect">
             <a:avLst/>
@@ -6521,8 +6521,8 @@
         </p:nvSpPr>
         <p:spPr>
           <a:xfrm>
-            <a:off x="1417320" y="3611880"/>
-            <a:ext cx="19050" cy="365760"/>
+            <a:off x="1417320" y="3429000"/>
+            <a:ext cx="19050" cy="429768"/>
           </a:xfrm>
           <a:prstGeom prst="rect">
             <a:avLst/>
@@ -6566,8 +6566,8 @@
         </p:nvSpPr>
         <p:spPr>
           <a:xfrm>
-            <a:off x="1691640" y="3520440"/>
-            <a:ext cx="3200400" cy="548640"/>
+            <a:off x="1691640" y="3337560"/>
+            <a:ext cx="3200400" cy="612648"/>
           </a:xfrm>
           <a:prstGeom prst="rect">
             <a:avLst/>
@@ -6605,8 +6605,8 @@
         </p:nvSpPr>
         <p:spPr>
           <a:xfrm>
-            <a:off x="5074920" y="3520440"/>
-            <a:ext cx="3931920" cy="548640"/>
+            <a:off x="5074920" y="3337560"/>
+            <a:ext cx="3931920" cy="612648"/>
           </a:xfrm>
           <a:prstGeom prst="rect">
             <a:avLst/>
@@ -6621,11 +6621,11 @@
           <a:p>
             <a:pPr algn="l">
               <a:lnSpc>
-                <a:spcPct val="132000"/>
+                <a:spcPct val="128000"/>
               </a:lnSpc>
             </a:pPr>
             <a:r>
-              <a:rPr sz="1100" b="0" i="0">
+              <a:rPr sz="900" b="0" i="0">
                 <a:solidFill>
                   <a:srgbClr val="141413"/>
                 </a:solidFill>
@@ -6644,8 +6644,8 @@
         </p:nvSpPr>
         <p:spPr>
           <a:xfrm>
-            <a:off x="9189720" y="3520440"/>
-            <a:ext cx="2286000" cy="548640"/>
+            <a:off x="9189720" y="3337560"/>
+            <a:ext cx="2286000" cy="612648"/>
           </a:xfrm>
           <a:prstGeom prst="rect">
             <a:avLst/>
@@ -6660,11 +6660,11 @@
           <a:p>
             <a:pPr algn="l">
               <a:lnSpc>
-                <a:spcPct val="130000"/>
+                <a:spcPct val="128000"/>
               </a:lnSpc>
             </a:pPr>
             <a:r>
-              <a:rPr sz="1000" b="0" i="1">
+              <a:rPr sz="800" b="0" i="1">
                 <a:solidFill>
                   <a:srgbClr val="D97757"/>
                 </a:solidFill>
@@ -6683,7 +6683,7 @@
         </p:nvSpPr>
         <p:spPr>
           <a:xfrm>
-            <a:off x="640080" y="4061460"/>
+            <a:off x="640080" y="3942588"/>
             <a:ext cx="10911535" cy="6350"/>
           </a:xfrm>
           <a:prstGeom prst="rect">
@@ -6728,8 +6728,8 @@
         </p:nvSpPr>
         <p:spPr>
           <a:xfrm>
-            <a:off x="640080" y="4069080"/>
-            <a:ext cx="777240" cy="548640"/>
+            <a:off x="640080" y="3950208"/>
+            <a:ext cx="777240" cy="612648"/>
           </a:xfrm>
           <a:prstGeom prst="rect">
             <a:avLst/>
@@ -6763,8 +6763,8 @@
         </p:nvSpPr>
         <p:spPr>
           <a:xfrm>
-            <a:off x="1417320" y="4160520"/>
-            <a:ext cx="19050" cy="365760"/>
+            <a:off x="1417320" y="4041648"/>
+            <a:ext cx="19050" cy="429768"/>
           </a:xfrm>
           <a:prstGeom prst="rect">
             <a:avLst/>
@@ -6808,8 +6808,8 @@
         </p:nvSpPr>
         <p:spPr>
           <a:xfrm>
-            <a:off x="1691640" y="4069080"/>
-            <a:ext cx="3200400" cy="548640"/>
+            <a:off x="1691640" y="3950208"/>
+            <a:ext cx="3200400" cy="612648"/>
           </a:xfrm>
           <a:prstGeom prst="rect">
             <a:avLst/>
@@ -6847,8 +6847,8 @@
         </p:nvSpPr>
         <p:spPr>
           <a:xfrm>
-            <a:off x="5074920" y="4069080"/>
-            <a:ext cx="3931920" cy="548640"/>
+            <a:off x="5074920" y="3950208"/>
+            <a:ext cx="3931920" cy="612648"/>
           </a:xfrm>
           <a:prstGeom prst="rect">
             <a:avLst/>
@@ -6863,11 +6863,11 @@
           <a:p>
             <a:pPr algn="l">
               <a:lnSpc>
-                <a:spcPct val="132000"/>
+                <a:spcPct val="128000"/>
               </a:lnSpc>
             </a:pPr>
             <a:r>
-              <a:rPr sz="1100" b="0" i="0">
+              <a:rPr sz="900" b="0" i="0">
                 <a:solidFill>
                   <a:srgbClr val="141413"/>
                 </a:solidFill>
@@ -6886,8 +6886,8 @@
         </p:nvSpPr>
         <p:spPr>
           <a:xfrm>
-            <a:off x="9189720" y="4069080"/>
-            <a:ext cx="2286000" cy="548640"/>
+            <a:off x="9189720" y="3950208"/>
+            <a:ext cx="2286000" cy="612648"/>
           </a:xfrm>
           <a:prstGeom prst="rect">
             <a:avLst/>
@@ -6902,11 +6902,11 @@
           <a:p>
             <a:pPr algn="l">
               <a:lnSpc>
-                <a:spcPct val="130000"/>
+                <a:spcPct val="128000"/>
               </a:lnSpc>
             </a:pPr>
             <a:r>
-              <a:rPr sz="1000" b="0" i="1">
+              <a:rPr sz="800" b="0" i="1">
                 <a:solidFill>
                   <a:srgbClr val="6A9BCC"/>
                 </a:solidFill>
@@ -6925,7 +6925,7 @@
         </p:nvSpPr>
         <p:spPr>
           <a:xfrm>
-            <a:off x="640080" y="4610100"/>
+            <a:off x="640080" y="4555236"/>
             <a:ext cx="10911535" cy="6350"/>
           </a:xfrm>
           <a:prstGeom prst="rect">
@@ -6970,8 +6970,8 @@
         </p:nvSpPr>
         <p:spPr>
           <a:xfrm>
-            <a:off x="640080" y="4617720"/>
-            <a:ext cx="777240" cy="548640"/>
+            <a:off x="640080" y="4562856"/>
+            <a:ext cx="777240" cy="612648"/>
           </a:xfrm>
           <a:prstGeom prst="rect">
             <a:avLst/>
@@ -7005,8 +7005,8 @@
         </p:nvSpPr>
         <p:spPr>
           <a:xfrm>
-            <a:off x="1417320" y="4709160"/>
-            <a:ext cx="19050" cy="365760"/>
+            <a:off x="1417320" y="4654296"/>
+            <a:ext cx="19050" cy="429768"/>
           </a:xfrm>
           <a:prstGeom prst="rect">
             <a:avLst/>
@@ -7050,8 +7050,8 @@
         </p:nvSpPr>
         <p:spPr>
           <a:xfrm>
-            <a:off x="1691640" y="4617720"/>
-            <a:ext cx="3200400" cy="548640"/>
+            <a:off x="1691640" y="4562856"/>
+            <a:ext cx="3200400" cy="612648"/>
           </a:xfrm>
           <a:prstGeom prst="rect">
             <a:avLst/>
@@ -7089,8 +7089,8 @@
         </p:nvSpPr>
         <p:spPr>
           <a:xfrm>
-            <a:off x="5074920" y="4617720"/>
-            <a:ext cx="3931920" cy="548640"/>
+            <a:off x="5074920" y="4562856"/>
+            <a:ext cx="3931920" cy="612648"/>
           </a:xfrm>
           <a:prstGeom prst="rect">
             <a:avLst/>
@@ -7105,11 +7105,11 @@
           <a:p>
             <a:pPr algn="l">
               <a:lnSpc>
-                <a:spcPct val="132000"/>
+                <a:spcPct val="128000"/>
               </a:lnSpc>
             </a:pPr>
             <a:r>
-              <a:rPr sz="1100" b="0" i="0">
+              <a:rPr sz="900" b="0" i="0">
                 <a:solidFill>
                   <a:srgbClr val="141413"/>
                 </a:solidFill>
@@ -7128,8 +7128,8 @@
         </p:nvSpPr>
         <p:spPr>
           <a:xfrm>
-            <a:off x="9189720" y="4617720"/>
-            <a:ext cx="2286000" cy="548640"/>
+            <a:off x="9189720" y="4562856"/>
+            <a:ext cx="2286000" cy="612648"/>
           </a:xfrm>
           <a:prstGeom prst="rect">
             <a:avLst/>
@@ -7144,11 +7144,11 @@
           <a:p>
             <a:pPr algn="l">
               <a:lnSpc>
-                <a:spcPct val="130000"/>
+                <a:spcPct val="128000"/>
               </a:lnSpc>
             </a:pPr>
             <a:r>
-              <a:rPr sz="1000" b="0" i="1">
+              <a:rPr sz="800" b="0" i="1">
                 <a:solidFill>
                   <a:srgbClr val="788C5D"/>
                 </a:solidFill>
@@ -7167,7 +7167,7 @@
         </p:nvSpPr>
         <p:spPr>
           <a:xfrm>
-            <a:off x="640080" y="5158740"/>
+            <a:off x="640080" y="5167884"/>
             <a:ext cx="10911535" cy="6350"/>
           </a:xfrm>
           <a:prstGeom prst="rect">
@@ -7212,8 +7212,8 @@
         </p:nvSpPr>
         <p:spPr>
           <a:xfrm>
-            <a:off x="640080" y="5166360"/>
-            <a:ext cx="777240" cy="548640"/>
+            <a:off x="640080" y="5175504"/>
+            <a:ext cx="777240" cy="612648"/>
           </a:xfrm>
           <a:prstGeom prst="rect">
             <a:avLst/>
@@ -7247,8 +7247,8 @@
         </p:nvSpPr>
         <p:spPr>
           <a:xfrm>
-            <a:off x="1417320" y="5257800"/>
-            <a:ext cx="19050" cy="365760"/>
+            <a:off x="1417320" y="5266944"/>
+            <a:ext cx="19050" cy="429768"/>
           </a:xfrm>
           <a:prstGeom prst="rect">
             <a:avLst/>
@@ -7292,8 +7292,8 @@
         </p:nvSpPr>
         <p:spPr>
           <a:xfrm>
-            <a:off x="1691640" y="5166360"/>
-            <a:ext cx="3200400" cy="548640"/>
+            <a:off x="1691640" y="5175504"/>
+            <a:ext cx="3200400" cy="612648"/>
           </a:xfrm>
           <a:prstGeom prst="rect">
             <a:avLst/>
@@ -7331,8 +7331,8 @@
         </p:nvSpPr>
         <p:spPr>
           <a:xfrm>
-            <a:off x="5074920" y="5166360"/>
-            <a:ext cx="3931920" cy="548640"/>
+            <a:off x="5074920" y="5175504"/>
+            <a:ext cx="3931920" cy="612648"/>
           </a:xfrm>
           <a:prstGeom prst="rect">
             <a:avLst/>
@@ -7347,11 +7347,11 @@
           <a:p>
             <a:pPr algn="l">
               <a:lnSpc>
-                <a:spcPct val="132000"/>
+                <a:spcPct val="128000"/>
               </a:lnSpc>
             </a:pPr>
             <a:r>
-              <a:rPr sz="1100" b="0" i="0">
+              <a:rPr sz="900" b="0" i="0">
                 <a:solidFill>
                   <a:srgbClr val="141413"/>
                 </a:solidFill>
@@ -7370,8 +7370,8 @@
         </p:nvSpPr>
         <p:spPr>
           <a:xfrm>
-            <a:off x="9189720" y="5166360"/>
-            <a:ext cx="2286000" cy="548640"/>
+            <a:off x="9189720" y="5175504"/>
+            <a:ext cx="2286000" cy="612648"/>
           </a:xfrm>
           <a:prstGeom prst="rect">
             <a:avLst/>
@@ -7386,11 +7386,11 @@
           <a:p>
             <a:pPr algn="l">
               <a:lnSpc>
-                <a:spcPct val="130000"/>
+                <a:spcPct val="128000"/>
               </a:lnSpc>
             </a:pPr>
             <a:r>
-              <a:rPr sz="1000" b="0" i="1">
+              <a:rPr sz="800" b="0" i="1">
                 <a:solidFill>
                   <a:srgbClr val="D97757"/>
                 </a:solidFill>
@@ -7409,7 +7409,7 @@
         </p:nvSpPr>
         <p:spPr>
           <a:xfrm>
-            <a:off x="640080" y="5707380"/>
+            <a:off x="640080" y="5780532"/>
             <a:ext cx="10911535" cy="6350"/>
           </a:xfrm>
           <a:prstGeom prst="rect">
@@ -7454,8 +7454,8 @@
         </p:nvSpPr>
         <p:spPr>
           <a:xfrm>
-            <a:off x="640080" y="5715000"/>
-            <a:ext cx="777240" cy="548640"/>
+            <a:off x="640080" y="5788152"/>
+            <a:ext cx="777240" cy="612648"/>
           </a:xfrm>
           <a:prstGeom prst="rect">
             <a:avLst/>
@@ -7489,8 +7489,8 @@
         </p:nvSpPr>
         <p:spPr>
           <a:xfrm>
-            <a:off x="1417320" y="5806440"/>
-            <a:ext cx="19050" cy="365760"/>
+            <a:off x="1417320" y="5879592"/>
+            <a:ext cx="19050" cy="429768"/>
           </a:xfrm>
           <a:prstGeom prst="rect">
             <a:avLst/>
@@ -7534,8 +7534,8 @@
         </p:nvSpPr>
         <p:spPr>
           <a:xfrm>
-            <a:off x="1691640" y="5715000"/>
-            <a:ext cx="3200400" cy="548640"/>
+            <a:off x="1691640" y="5788152"/>
+            <a:ext cx="3200400" cy="612648"/>
           </a:xfrm>
           <a:prstGeom prst="rect">
             <a:avLst/>
@@ -7573,8 +7573,8 @@
         </p:nvSpPr>
         <p:spPr>
           <a:xfrm>
-            <a:off x="5074920" y="5715000"/>
-            <a:ext cx="3931920" cy="548640"/>
+            <a:off x="5074920" y="5788152"/>
+            <a:ext cx="3931920" cy="612648"/>
           </a:xfrm>
           <a:prstGeom prst="rect">
             <a:avLst/>
@@ -7589,11 +7589,11 @@
           <a:p>
             <a:pPr algn="l">
               <a:lnSpc>
-                <a:spcPct val="132000"/>
+                <a:spcPct val="128000"/>
               </a:lnSpc>
             </a:pPr>
             <a:r>
-              <a:rPr sz="1100" b="0" i="0">
+              <a:rPr sz="900" b="0" i="0">
                 <a:solidFill>
                   <a:srgbClr val="141413"/>
                 </a:solidFill>
@@ -7612,8 +7612,8 @@
         </p:nvSpPr>
         <p:spPr>
           <a:xfrm>
-            <a:off x="9189720" y="5715000"/>
-            <a:ext cx="2286000" cy="548640"/>
+            <a:off x="9189720" y="5788152"/>
+            <a:ext cx="2286000" cy="612648"/>
           </a:xfrm>
           <a:prstGeom prst="rect">
             <a:avLst/>
@@ -7628,11 +7628,11 @@
           <a:p>
             <a:pPr algn="l">
               <a:lnSpc>
-                <a:spcPct val="130000"/>
+                <a:spcPct val="128000"/>
               </a:lnSpc>
             </a:pPr>
             <a:r>
-              <a:rPr sz="1000" b="0" i="1">
+              <a:rPr sz="800" b="0" i="1">
                 <a:solidFill>
                   <a:srgbClr val="6A9BCC"/>
                 </a:solidFill>
@@ -7651,7 +7651,7 @@
         </p:nvSpPr>
         <p:spPr>
           <a:xfrm>
-            <a:off x="640080" y="6256020"/>
+            <a:off x="640080" y="6393180"/>
             <a:ext cx="10911535" cy="6350"/>
           </a:xfrm>
           <a:prstGeom prst="rect">
